--- a/スライド案/hackathon_pitch_v1.pptx
+++ b/スライド案/hackathon_pitch_v1.pptx
@@ -3820,7 +3820,7 @@
                 <a:ea typeface="Calibri" pitchFamily="34" charset="-122"/>
                 <a:cs typeface="Calibri" pitchFamily="34" charset="-120"/>
               </a:rPr>
-              <a:t>高リスク従業員（#622／93.2%）で実演</a:t>
+              <a:t>高リスク従業員（#622／99.2%）で実演</a:t>
             </a:r>
             <a:endParaRPr lang="en-US" sz="1300" dirty="0"/>
           </a:p>
